--- a/media/resources/files/Onduktar_Akcha_KazynaIzdoo_7YCSfxU.pptx
+++ b/media/resources/files/Onduktar_Akcha_KazynaIzdoo_7YCSfxU.pptx
@@ -17163,7 +17163,7 @@
                 <a:ea typeface="+mn-ea"/>
                 <a:cs typeface="+mn-cs"/>
               </a:rPr>
-              <a:t>Турдуу пикирлер учун ыраазычылык билдиребиз.</a:t>
+              <a:t>Түрдүү пикирлер үчүн ыраазычылык билдиребиз.</a:t>
             </a:r>
           </a:p>
           <a:p>

--- a/media/resources/files/Onduktar_Akcha_KazynaIzdoo_7YCSfxU.pptx
+++ b/media/resources/files/Onduktar_Akcha_KazynaIzdoo_7YCSfxU.pptx
@@ -6663,7 +6663,7 @@
             <a:pPr algn="ctr"/>
             <a:r>
               <a:rPr lang="en-GB" sz="11500" dirty="0"/>
-              <a:t>1313.32</a:t>
+              <a:t>1313,32</a:t>
             </a:r>
             <a:r>
               <a:rPr lang="ky-KG" sz="11500" dirty="0"/>
@@ -7177,7 +7177,7 @@
             <a:pPr algn="ctr"/>
             <a:r>
               <a:rPr lang="en-GB" sz="11500" dirty="0"/>
-              <a:t>24.20</a:t>
+              <a:t>24,20</a:t>
             </a:r>
             <a:r>
               <a:rPr lang="ky-KG" sz="11500" dirty="0"/>
@@ -7644,7 +7644,7 @@
             <a:pPr algn="ctr"/>
             <a:r>
               <a:rPr lang="ky-KG" sz="3200" dirty="0"/>
-              <a:t>Же болбосо, сиз аны 12да , ай сайын </a:t>
+              <a:t>Же болбосо, сиз аны 12да, ай сайын </a:t>
             </a:r>
           </a:p>
           <a:p>
@@ -8696,7 +8696,7 @@
             <a:pPr algn="ctr"/>
             <a:r>
               <a:rPr lang="ky-KG" sz="3200" dirty="0"/>
-              <a:t>Полли ар бир студентке балмуздак сатып алуу үчүн </a:t>
+              <a:t>Полли ар бир окуучуга балмуздак сатып алуу үчүн </a:t>
             </a:r>
             <a:endParaRPr lang="en-US" sz="3200" dirty="0"/>
           </a:p>
@@ -8741,7 +8741,7 @@
             <a:pPr algn="ctr"/>
             <a:r>
               <a:rPr lang="en-GB" sz="9600" dirty="0"/>
-              <a:t>16,205.73</a:t>
+              <a:t>16 205,73</a:t>
             </a:r>
             <a:r>
               <a:rPr lang="ky-KG" sz="9600" dirty="0"/>
@@ -9202,7 +9202,7 @@
                             <a:sysClr val="windowText" lastClr="000000"/>
                           </a:solidFill>
                         </a:rPr>
-                        <a:t>97.07 </a:t>
+                        <a:t>97,07 </a:t>
                       </a:r>
                       <a:r>
                         <a:rPr lang="ky-KG" sz="3200" b="1" dirty="0">
@@ -9712,7 +9712,7 @@
                             <a:sysClr val="windowText" lastClr="000000"/>
                           </a:solidFill>
                         </a:rPr>
-                        <a:t>6,026.32сом</a:t>
+                        <a:t>6 026,32сом</a:t>
                       </a:r>
                       <a:endParaRPr lang="en-GB" sz="3200" b="1" dirty="0">
                         <a:solidFill>
@@ -10847,7 +10847,7 @@
                             <a:sysClr val="windowText" lastClr="000000"/>
                           </a:solidFill>
                         </a:rPr>
-                        <a:t>16,205.73 сом</a:t>
+                        <a:t>16 205,73 сом</a:t>
                       </a:r>
                       <a:endParaRPr lang="en-GB" sz="3200" b="1" dirty="0">
                         <a:solidFill>
@@ -17799,7 +17799,7 @@
             <a:pPr algn="ctr"/>
             <a:r>
               <a:rPr lang="ky-KG" sz="3200" dirty="0"/>
-              <a:t>Наабайчыга канча кап , 1 кгдык ун керек?</a:t>
+              <a:t>Наабайчыга канча кап, 1 кгдык ун керек?</a:t>
             </a:r>
             <a:endParaRPr lang="en-GB" sz="3200" dirty="0"/>
           </a:p>
@@ -17836,7 +17836,7 @@
             <a:pPr algn="ctr"/>
             <a:r>
               <a:rPr lang="en-GB" sz="11500" dirty="0"/>
-              <a:t>97.07</a:t>
+              <a:t>97,07</a:t>
             </a:r>
             <a:r>
               <a:rPr lang="ky-KG" sz="11500" dirty="0"/>
